--- a/prezentacie/c04w.pptx
+++ b/prezentacie/c04w.pptx
@@ -255,7 +255,7 @@
           <a:p>
             <a:fld id="{10052495-8BC8-4CFB-94B1-B0429F101A0D}" type="datetimeFigureOut">
               <a:rPr lang="sk-SK" smtClean="0"/>
-              <a:t>1. 10. 2025</a:t>
+              <a:t>28. 9. 2026</a:t>
             </a:fld>
             <a:endParaRPr lang="sk-SK"/>
           </a:p>
@@ -425,7 +425,7 @@
           <a:p>
             <a:fld id="{10052495-8BC8-4CFB-94B1-B0429F101A0D}" type="datetimeFigureOut">
               <a:rPr lang="sk-SK" smtClean="0"/>
-              <a:t>1. 10. 2025</a:t>
+              <a:t>28. 9. 2026</a:t>
             </a:fld>
             <a:endParaRPr lang="sk-SK"/>
           </a:p>
@@ -605,7 +605,7 @@
           <a:p>
             <a:fld id="{10052495-8BC8-4CFB-94B1-B0429F101A0D}" type="datetimeFigureOut">
               <a:rPr lang="sk-SK" smtClean="0"/>
-              <a:t>1. 10. 2025</a:t>
+              <a:t>28. 9. 2026</a:t>
             </a:fld>
             <a:endParaRPr lang="sk-SK"/>
           </a:p>
@@ -775,7 +775,7 @@
           <a:p>
             <a:fld id="{10052495-8BC8-4CFB-94B1-B0429F101A0D}" type="datetimeFigureOut">
               <a:rPr lang="sk-SK" smtClean="0"/>
-              <a:t>1. 10. 2025</a:t>
+              <a:t>28. 9. 2026</a:t>
             </a:fld>
             <a:endParaRPr lang="sk-SK"/>
           </a:p>
@@ -1021,7 +1021,7 @@
           <a:p>
             <a:fld id="{10052495-8BC8-4CFB-94B1-B0429F101A0D}" type="datetimeFigureOut">
               <a:rPr lang="sk-SK" smtClean="0"/>
-              <a:t>1. 10. 2025</a:t>
+              <a:t>28. 9. 2026</a:t>
             </a:fld>
             <a:endParaRPr lang="sk-SK"/>
           </a:p>
@@ -1253,7 +1253,7 @@
           <a:p>
             <a:fld id="{10052495-8BC8-4CFB-94B1-B0429F101A0D}" type="datetimeFigureOut">
               <a:rPr lang="sk-SK" smtClean="0"/>
-              <a:t>1. 10. 2025</a:t>
+              <a:t>28. 9. 2026</a:t>
             </a:fld>
             <a:endParaRPr lang="sk-SK"/>
           </a:p>
@@ -1620,7 +1620,7 @@
           <a:p>
             <a:fld id="{10052495-8BC8-4CFB-94B1-B0429F101A0D}" type="datetimeFigureOut">
               <a:rPr lang="sk-SK" smtClean="0"/>
-              <a:t>1. 10. 2025</a:t>
+              <a:t>28. 9. 2026</a:t>
             </a:fld>
             <a:endParaRPr lang="sk-SK"/>
           </a:p>
@@ -1738,7 +1738,7 @@
           <a:p>
             <a:fld id="{10052495-8BC8-4CFB-94B1-B0429F101A0D}" type="datetimeFigureOut">
               <a:rPr lang="sk-SK" smtClean="0"/>
-              <a:t>1. 10. 2025</a:t>
+              <a:t>28. 9. 2026</a:t>
             </a:fld>
             <a:endParaRPr lang="sk-SK"/>
           </a:p>
@@ -1833,7 +1833,7 @@
           <a:p>
             <a:fld id="{10052495-8BC8-4CFB-94B1-B0429F101A0D}" type="datetimeFigureOut">
               <a:rPr lang="sk-SK" smtClean="0"/>
-              <a:t>1. 10. 2025</a:t>
+              <a:t>28. 9. 2026</a:t>
             </a:fld>
             <a:endParaRPr lang="sk-SK"/>
           </a:p>
@@ -2110,7 +2110,7 @@
           <a:p>
             <a:fld id="{10052495-8BC8-4CFB-94B1-B0429F101A0D}" type="datetimeFigureOut">
               <a:rPr lang="sk-SK" smtClean="0"/>
-              <a:t>1. 10. 2025</a:t>
+              <a:t>28. 9. 2026</a:t>
             </a:fld>
             <a:endParaRPr lang="sk-SK"/>
           </a:p>
@@ -2367,7 +2367,7 @@
           <a:p>
             <a:fld id="{10052495-8BC8-4CFB-94B1-B0429F101A0D}" type="datetimeFigureOut">
               <a:rPr lang="sk-SK" smtClean="0"/>
-              <a:t>1. 10. 2025</a:t>
+              <a:t>28. 9. 2026</a:t>
             </a:fld>
             <a:endParaRPr lang="sk-SK"/>
           </a:p>
@@ -2580,7 +2580,7 @@
           <a:p>
             <a:fld id="{10052495-8BC8-4CFB-94B1-B0429F101A0D}" type="datetimeFigureOut">
               <a:rPr lang="sk-SK" smtClean="0"/>
-              <a:t>1. 10. 2025</a:t>
+              <a:t>28. 9. 2026</a:t>
             </a:fld>
             <a:endParaRPr lang="sk-SK"/>
           </a:p>
@@ -3507,7 +3507,15 @@
             </a:br>
             <a:r>
               <a:rPr lang="sk-SK" b="1" dirty="0"/>
-              <a:t>Ing. Jozef Wagner PhD.</a:t>
+              <a:t>Ing. Jozef Wagner</a:t>
+            </a:r>
+            <a:r>
+              <a:rPr lang="en-US" b="1" dirty="0"/>
+              <a:t>,</a:t>
+            </a:r>
+            <a:r>
+              <a:rPr lang="sk-SK" b="1" dirty="0"/>
+              <a:t> PhD.</a:t>
             </a:r>
           </a:p>
           <a:p>
@@ -3755,11 +3763,21 @@
               <a:buNone/>
             </a:pPr>
             <a:r>
-              <a:rPr lang="sk-SK" dirty="0"/>
+              <a:rPr lang="sk-SK" dirty="0">
+                <a:solidFill>
+                  <a:srgbClr val="FF0000"/>
+                </a:solidFill>
+                <a:highlight>
+                  <a:srgbClr val="00FFFF"/>
+                </a:highlight>
+              </a:rPr>
               <a:t>Utility v triede </a:t>
             </a:r>
             <a:r>
               <a:rPr lang="sk-SK" dirty="0" err="1">
+                <a:solidFill>
+                  <a:srgbClr val="FF0000"/>
+                </a:solidFill>
                 <a:highlight>
                   <a:srgbClr val="FFFF00"/>
                 </a:highlight>
@@ -3768,6 +3786,9 @@
               <a:t>java.util.Arrays</a:t>
             </a:r>
             <a:endParaRPr lang="sk-SK" dirty="0">
+              <a:solidFill>
+                <a:srgbClr val="FF0000"/>
+              </a:solidFill>
               <a:highlight>
                 <a:srgbClr val="FFFF00"/>
               </a:highlight>
@@ -3785,6 +3806,9 @@
               <a:buNone/>
             </a:pPr>
             <a:endParaRPr lang="sk-SK" dirty="0">
+              <a:solidFill>
+                <a:srgbClr val="FF0000"/>
+              </a:solidFill>
               <a:highlight>
                 <a:srgbClr val="FFFF00"/>
               </a:highlight>
@@ -3802,6 +3826,9 @@
             </a:pPr>
             <a:r>
               <a:rPr lang="sk-SK" sz="2800" dirty="0" err="1">
+                <a:solidFill>
+                  <a:srgbClr val="FF0000"/>
+                </a:solidFill>
                 <a:highlight>
                   <a:srgbClr val="FFFF00"/>
                 </a:highlight>
@@ -3810,7 +3837,14 @@
               <a:t>Arrays.equals</a:t>
             </a:r>
             <a:r>
-              <a:rPr lang="sk-SK" sz="2800" dirty="0"/>
+              <a:rPr lang="sk-SK" sz="2800" dirty="0">
+                <a:solidFill>
+                  <a:srgbClr val="FF0000"/>
+                </a:solidFill>
+                <a:highlight>
+                  <a:srgbClr val="00FFFF"/>
+                </a:highlight>
+              </a:rPr>
               <a:t> – porovnanie hodnôt</a:t>
             </a:r>
           </a:p>
@@ -3825,6 +3859,9 @@
             </a:pPr>
             <a:r>
               <a:rPr lang="sk-SK" sz="2800" dirty="0" err="1">
+                <a:solidFill>
+                  <a:srgbClr val="FF0000"/>
+                </a:solidFill>
                 <a:highlight>
                   <a:srgbClr val="FFFF00"/>
                 </a:highlight>
@@ -3833,7 +3870,14 @@
               <a:t>Arrays.toString</a:t>
             </a:r>
             <a:r>
-              <a:rPr lang="sk-SK" sz="2800" dirty="0"/>
+              <a:rPr lang="sk-SK" sz="2800" dirty="0">
+                <a:solidFill>
+                  <a:srgbClr val="FF0000"/>
+                </a:solidFill>
+                <a:highlight>
+                  <a:srgbClr val="00FFFF"/>
+                </a:highlight>
+              </a:rPr>
               <a:t> – výpis hodnôt</a:t>
             </a:r>
           </a:p>
@@ -3848,6 +3892,9 @@
             </a:pPr>
             <a:r>
               <a:rPr lang="sk-SK" sz="2800" dirty="0" err="1">
+                <a:solidFill>
+                  <a:srgbClr val="FF0000"/>
+                </a:solidFill>
                 <a:highlight>
                   <a:srgbClr val="FFFF00"/>
                 </a:highlight>
@@ -3856,7 +3903,14 @@
               <a:t>Arrays.sort</a:t>
             </a:r>
             <a:r>
-              <a:rPr lang="sk-SK" sz="2800" dirty="0"/>
+              <a:rPr lang="sk-SK" sz="2800" dirty="0">
+                <a:solidFill>
+                  <a:srgbClr val="FF0000"/>
+                </a:solidFill>
+                <a:highlight>
+                  <a:srgbClr val="00FFFF"/>
+                </a:highlight>
+              </a:rPr>
               <a:t> – zoradenie</a:t>
             </a:r>
           </a:p>
@@ -3871,6 +3925,9 @@
             </a:pPr>
             <a:r>
               <a:rPr lang="sk-SK" sz="2800" dirty="0" err="1">
+                <a:solidFill>
+                  <a:srgbClr val="FF0000"/>
+                </a:solidFill>
                 <a:highlight>
                   <a:srgbClr val="FFFF00"/>
                 </a:highlight>
@@ -3879,7 +3936,14 @@
               <a:t>Arrays.copyOf</a:t>
             </a:r>
             <a:r>
-              <a:rPr lang="sk-SK" sz="2800" dirty="0"/>
+              <a:rPr lang="sk-SK" sz="2800" dirty="0">
+                <a:solidFill>
+                  <a:srgbClr val="FF0000"/>
+                </a:solidFill>
+                <a:highlight>
+                  <a:srgbClr val="00FFFF"/>
+                </a:highlight>
+              </a:rPr>
               <a:t> – kópia časti poľa</a:t>
             </a:r>
           </a:p>
@@ -3905,7 +3969,14 @@
               <a:buNone/>
             </a:pPr>
             <a:r>
-              <a:rPr lang="sk-SK" dirty="0"/>
+              <a:rPr lang="sk-SK" dirty="0">
+                <a:solidFill>
+                  <a:srgbClr val="FF0000"/>
+                </a:solidFill>
+                <a:highlight>
+                  <a:srgbClr val="00FFFF"/>
+                </a:highlight>
+              </a:rPr>
               <a:t>Viacrozmerné pole</a:t>
             </a:r>
           </a:p>
@@ -3921,6 +3992,9 @@
             </a:pPr>
             <a:r>
               <a:rPr lang="sk-SK" dirty="0" err="1">
+                <a:solidFill>
+                  <a:srgbClr val="FF0000"/>
+                </a:solidFill>
                 <a:highlight>
                   <a:srgbClr val="FFFF00"/>
                 </a:highlight>
@@ -3930,6 +4004,9 @@
             </a:r>
             <a:r>
               <a:rPr lang="sk-SK" dirty="0">
+                <a:solidFill>
+                  <a:srgbClr val="FF0000"/>
+                </a:solidFill>
                 <a:highlight>
                   <a:srgbClr val="FFFF00"/>
                 </a:highlight>
@@ -3939,6 +4016,9 @@
             </a:r>
             <a:r>
               <a:rPr lang="sk-SK" dirty="0" err="1">
+                <a:solidFill>
+                  <a:srgbClr val="FF0000"/>
+                </a:solidFill>
                 <a:highlight>
                   <a:srgbClr val="FFFF00"/>
                 </a:highlight>
@@ -3948,6 +4028,9 @@
             </a:r>
             <a:r>
               <a:rPr lang="sk-SK" dirty="0">
+                <a:solidFill>
+                  <a:srgbClr val="FF0000"/>
+                </a:solidFill>
                 <a:highlight>
                   <a:srgbClr val="FFFF00"/>
                 </a:highlight>
@@ -3968,6 +4051,9 @@
             </a:pPr>
             <a:r>
               <a:rPr lang="sk-SK" dirty="0">
+                <a:solidFill>
+                  <a:srgbClr val="FF0000"/>
+                </a:solidFill>
                 <a:highlight>
                   <a:srgbClr val="FFFF00"/>
                 </a:highlight>
@@ -4088,11 +4174,25 @@
               <a:buNone/>
             </a:pPr>
             <a:r>
-              <a:rPr lang="sk-SK" dirty="0" err="1"/>
+              <a:rPr lang="sk-SK" dirty="0" err="1">
+                <a:solidFill>
+                  <a:srgbClr val="FF0000"/>
+                </a:solidFill>
+                <a:highlight>
+                  <a:srgbClr val="00FFFF"/>
+                </a:highlight>
+              </a:rPr>
               <a:t>Varargs</a:t>
             </a:r>
             <a:r>
-              <a:rPr lang="sk-SK" dirty="0"/>
+              <a:rPr lang="sk-SK" dirty="0">
+                <a:solidFill>
+                  <a:srgbClr val="FF0000"/>
+                </a:solidFill>
+                <a:highlight>
+                  <a:srgbClr val="00FFFF"/>
+                </a:highlight>
+              </a:rPr>
               <a:t> - premenlivý počet argumentov pri volaní metódy</a:t>
             </a:r>
           </a:p>
@@ -4120,6 +4220,9 @@
             </a:pPr>
             <a:r>
               <a:rPr lang="sk-SK" dirty="0" err="1">
+                <a:solidFill>
+                  <a:srgbClr val="FF0000"/>
+                </a:solidFill>
                 <a:highlight>
                   <a:srgbClr val="FFFF00"/>
                 </a:highlight>
@@ -4129,6 +4232,9 @@
             </a:r>
             <a:r>
               <a:rPr lang="sk-SK" dirty="0">
+                <a:solidFill>
+                  <a:srgbClr val="FF0000"/>
+                </a:solidFill>
                 <a:highlight>
                   <a:srgbClr val="FFFF00"/>
                 </a:highlight>
@@ -4138,6 +4244,9 @@
             </a:r>
             <a:r>
               <a:rPr lang="sk-SK" dirty="0" err="1">
+                <a:solidFill>
+                  <a:srgbClr val="FF0000"/>
+                </a:solidFill>
                 <a:highlight>
                   <a:srgbClr val="FFFF00"/>
                 </a:highlight>
@@ -4147,6 +4256,9 @@
             </a:r>
             <a:r>
               <a:rPr lang="sk-SK" dirty="0">
+                <a:solidFill>
+                  <a:srgbClr val="FF0000"/>
+                </a:solidFill>
                 <a:highlight>
                   <a:srgbClr val="FFFF00"/>
                 </a:highlight>
@@ -4156,6 +4268,9 @@
             </a:r>
             <a:r>
               <a:rPr lang="sk-SK" dirty="0" err="1">
+                <a:solidFill>
+                  <a:srgbClr val="FF0000"/>
+                </a:solidFill>
                 <a:highlight>
                   <a:srgbClr val="FFFF00"/>
                 </a:highlight>
@@ -4165,6 +4280,9 @@
             </a:r>
             <a:r>
               <a:rPr lang="sk-SK" dirty="0">
+                <a:solidFill>
+                  <a:srgbClr val="FF0000"/>
+                </a:solidFill>
                 <a:highlight>
                   <a:srgbClr val="FFFF00"/>
                 </a:highlight>
@@ -4174,6 +4292,9 @@
             </a:r>
             <a:r>
               <a:rPr lang="sk-SK" dirty="0" err="1">
+                <a:solidFill>
+                  <a:srgbClr val="FF0000"/>
+                </a:solidFill>
                 <a:highlight>
                   <a:srgbClr val="FFFF00"/>
                 </a:highlight>
@@ -4183,6 +4304,9 @@
             </a:r>
             <a:r>
               <a:rPr lang="sk-SK" dirty="0">
+                <a:solidFill>
+                  <a:srgbClr val="FF0000"/>
+                </a:solidFill>
                 <a:highlight>
                   <a:srgbClr val="FFFF00"/>
                 </a:highlight>
@@ -4192,6 +4316,9 @@
             </a:r>
             <a:r>
               <a:rPr lang="sk-SK" b="1" dirty="0" err="1">
+                <a:solidFill>
+                  <a:srgbClr val="FF0000"/>
+                </a:solidFill>
                 <a:highlight>
                   <a:srgbClr val="FFFF00"/>
                 </a:highlight>
@@ -4201,6 +4328,9 @@
             </a:r>
             <a:r>
               <a:rPr lang="sk-SK" b="1" dirty="0">
+                <a:solidFill>
+                  <a:srgbClr val="FF0000"/>
+                </a:solidFill>
                 <a:highlight>
                   <a:srgbClr val="FFFF00"/>
                 </a:highlight>
@@ -4210,6 +4340,9 @@
             </a:r>
             <a:r>
               <a:rPr lang="sk-SK" dirty="0">
+                <a:solidFill>
+                  <a:srgbClr val="FF0000"/>
+                </a:solidFill>
                 <a:highlight>
                   <a:srgbClr val="FFFF00"/>
                 </a:highlight>
@@ -4246,7 +4379,14 @@
               <a:buNone/>
             </a:pPr>
             <a:r>
-              <a:rPr lang="sk-SK" dirty="0"/>
+              <a:rPr lang="sk-SK" dirty="0">
+                <a:solidFill>
+                  <a:srgbClr val="FF0000"/>
+                </a:solidFill>
+                <a:highlight>
+                  <a:srgbClr val="00FFFF"/>
+                </a:highlight>
+              </a:rPr>
               <a:t>V tele metódy sú tieto argumenty uložené do poľa</a:t>
             </a:r>
           </a:p>
@@ -4260,7 +4400,14 @@
               </a:spcBef>
               <a:buNone/>
             </a:pPr>
-            <a:endParaRPr lang="sk-SK" dirty="0"/>
+            <a:endParaRPr lang="sk-SK" dirty="0">
+              <a:solidFill>
+                <a:srgbClr val="FF0000"/>
+              </a:solidFill>
+              <a:highlight>
+                <a:srgbClr val="00FFFF"/>
+              </a:highlight>
+            </a:endParaRPr>
           </a:p>
           <a:p>
             <a:pPr marL="0" indent="0">
@@ -4273,20 +4420,44 @@
               <a:buNone/>
             </a:pPr>
             <a:r>
-              <a:rPr lang="sk-SK" dirty="0"/>
+              <a:rPr lang="sk-SK" dirty="0">
+                <a:solidFill>
+                  <a:srgbClr val="FF0000"/>
+                </a:solidFill>
+                <a:highlight>
+                  <a:srgbClr val="00FFFF"/>
+                </a:highlight>
+              </a:rPr>
               <a:t>Ak ako </a:t>
             </a:r>
             <a:r>
-              <a:rPr lang="sk-SK" dirty="0" err="1"/>
+              <a:rPr lang="sk-SK" dirty="0" err="1">
+                <a:solidFill>
+                  <a:srgbClr val="FF0000"/>
+                </a:solidFill>
+                <a:highlight>
+                  <a:srgbClr val="00FFFF"/>
+                </a:highlight>
+              </a:rPr>
               <a:t>vararg</a:t>
             </a:r>
             <a:r>
-              <a:rPr lang="sk-SK" dirty="0"/>
+              <a:rPr lang="sk-SK" dirty="0">
+                <a:solidFill>
+                  <a:srgbClr val="FF0000"/>
+                </a:solidFill>
+                <a:highlight>
+                  <a:srgbClr val="00FFFF"/>
+                </a:highlight>
+              </a:rPr>
               <a:t> argument uvediem pole, použije sa ako pole argumentov</a:t>
             </a:r>
             <a:endParaRPr lang="sk-SK" dirty="0">
+              <a:solidFill>
+                <a:srgbClr val="FF0000"/>
+              </a:solidFill>
               <a:highlight>
-                <a:srgbClr val="FFFF00"/>
+                <a:srgbClr val="00FFFF"/>
               </a:highlight>
               <a:latin typeface="Consolas" panose="020B0609020204030204" pitchFamily="49" charset="0"/>
             </a:endParaRPr>
@@ -4315,10 +4486,24 @@
           <a:lstStyle/>
           <a:p>
             <a:r>
-              <a:rPr lang="sk-SK" dirty="0" err="1"/>
+              <a:rPr lang="sk-SK" dirty="0" err="1">
+                <a:solidFill>
+                  <a:srgbClr val="FF0000"/>
+                </a:solidFill>
+                <a:highlight>
+                  <a:srgbClr val="00FFFF"/>
+                </a:highlight>
+              </a:rPr>
               <a:t>Varargs</a:t>
             </a:r>
-            <a:endParaRPr lang="sk-SK" dirty="0"/>
+            <a:endParaRPr lang="sk-SK" dirty="0">
+              <a:solidFill>
+                <a:srgbClr val="FF0000"/>
+              </a:solidFill>
+              <a:highlight>
+                <a:srgbClr val="00FFFF"/>
+              </a:highlight>
+            </a:endParaRPr>
           </a:p>
         </p:txBody>
       </p:sp>
@@ -5824,7 +6009,14 @@
               <a:buNone/>
             </a:pPr>
             <a:r>
-              <a:rPr lang="pl-PL" dirty="0"/>
+              <a:rPr lang="pl-PL" dirty="0">
+                <a:solidFill>
+                  <a:srgbClr val="FF0000"/>
+                </a:solidFill>
+                <a:highlight>
+                  <a:srgbClr val="00FFFF"/>
+                </a:highlight>
+              </a:rPr>
               <a:t>Pole - Array, je zoznam hodnôt jedného typu</a:t>
             </a:r>
           </a:p>
@@ -5851,7 +6043,14 @@
               <a:buNone/>
             </a:pPr>
             <a:r>
-              <a:rPr lang="pl-PL" dirty="0"/>
+              <a:rPr lang="pl-PL" dirty="0">
+                <a:solidFill>
+                  <a:srgbClr val="FF0000"/>
+                </a:solidFill>
+                <a:highlight>
+                  <a:srgbClr val="00FFFF"/>
+                </a:highlight>
+              </a:rPr>
               <a:t>Vlastnosti:</a:t>
             </a:r>
           </a:p>
@@ -5865,7 +6064,14 @@
               </a:spcBef>
             </a:pPr>
             <a:r>
-              <a:rPr lang="pl-PL" sz="2800" dirty="0"/>
+              <a:rPr lang="pl-PL" sz="2800" dirty="0">
+                <a:solidFill>
+                  <a:srgbClr val="FF0000"/>
+                </a:solidFill>
+                <a:highlight>
+                  <a:srgbClr val="00FFFF"/>
+                </a:highlight>
+              </a:rPr>
               <a:t>fixná nemenná veľkosť</a:t>
             </a:r>
           </a:p>
@@ -5879,7 +6085,14 @@
               </a:spcBef>
             </a:pPr>
             <a:r>
-              <a:rPr lang="pl-PL" sz="2800" dirty="0"/>
+              <a:rPr lang="pl-PL" sz="2800" dirty="0">
+                <a:solidFill>
+                  <a:srgbClr val="FF0000"/>
+                </a:solidFill>
+                <a:highlight>
+                  <a:srgbClr val="00FFFF"/>
+                </a:highlight>
+              </a:rPr>
               <a:t>hodnoty prvkov meniť viem</a:t>
             </a:r>
           </a:p>
@@ -5893,7 +6106,14 @@
               </a:spcBef>
             </a:pPr>
             <a:r>
-              <a:rPr lang="pl-PL" sz="2800" dirty="0"/>
+              <a:rPr lang="pl-PL" sz="2800" dirty="0">
+                <a:solidFill>
+                  <a:srgbClr val="FF0000"/>
+                </a:solidFill>
+                <a:highlight>
+                  <a:srgbClr val="00FFFF"/>
+                </a:highlight>
+              </a:rPr>
               <a:t>všetky prvky musia mať rovnaký typ</a:t>
             </a:r>
           </a:p>
@@ -5907,7 +6127,14 @@
               </a:spcBef>
             </a:pPr>
             <a:r>
-              <a:rPr lang="pl-PL" sz="2800" dirty="0"/>
+              <a:rPr lang="pl-PL" sz="2800" dirty="0">
+                <a:solidFill>
+                  <a:srgbClr val="FF0000"/>
+                </a:solidFill>
+                <a:highlight>
+                  <a:srgbClr val="00FFFF"/>
+                </a:highlight>
+              </a:rPr>
               <a:t>pole je objekt</a:t>
             </a:r>
           </a:p>
@@ -5921,7 +6148,14 @@
               </a:spcBef>
             </a:pPr>
             <a:r>
-              <a:rPr lang="pl-PL" sz="2800" dirty="0"/>
+              <a:rPr lang="pl-PL" sz="2800" dirty="0">
+                <a:solidFill>
+                  <a:srgbClr val="FF0000"/>
+                </a:solidFill>
+                <a:highlight>
+                  <a:srgbClr val="00FFFF"/>
+                </a:highlight>
+              </a:rPr>
               <a:t>prvky majú poradie, index</a:t>
             </a:r>
           </a:p>
@@ -5949,7 +6183,14 @@
           <a:lstStyle/>
           <a:p>
             <a:r>
-              <a:rPr lang="sk-SK" dirty="0"/>
+              <a:rPr lang="sk-SK" dirty="0">
+                <a:solidFill>
+                  <a:srgbClr val="FF0000"/>
+                </a:solidFill>
+                <a:highlight>
+                  <a:srgbClr val="00FFFF"/>
+                </a:highlight>
+              </a:rPr>
               <a:t>Polia</a:t>
             </a:r>
           </a:p>
@@ -6034,7 +6275,14 @@
               <a:buNone/>
             </a:pPr>
             <a:r>
-              <a:rPr lang="sk-SK" dirty="0"/>
+              <a:rPr lang="sk-SK" dirty="0">
+                <a:solidFill>
+                  <a:srgbClr val="FF0000"/>
+                </a:solidFill>
+                <a:highlight>
+                  <a:srgbClr val="00FFFF"/>
+                </a:highlight>
+              </a:rPr>
               <a:t>Pri vytváraní poľa musím uviesť jeho veľkosť</a:t>
             </a:r>
           </a:p>
@@ -6045,7 +6293,11 @@
               </a:spcBef>
               <a:buNone/>
             </a:pPr>
-            <a:endParaRPr lang="sk-SK" dirty="0"/>
+            <a:endParaRPr lang="sk-SK" dirty="0">
+              <a:solidFill>
+                <a:srgbClr val="FF0000"/>
+              </a:solidFill>
+            </a:endParaRPr>
           </a:p>
           <a:p>
             <a:pPr marL="0" indent="0">
@@ -6056,6 +6308,9 @@
             </a:pPr>
             <a:r>
               <a:rPr lang="sk-SK" dirty="0" err="1">
+                <a:solidFill>
+                  <a:srgbClr val="FF0000"/>
+                </a:solidFill>
                 <a:highlight>
                   <a:srgbClr val="FFFF00"/>
                 </a:highlight>
@@ -6065,6 +6320,9 @@
             </a:r>
             <a:r>
               <a:rPr lang="sk-SK" dirty="0">
+                <a:solidFill>
+                  <a:srgbClr val="FF0000"/>
+                </a:solidFill>
                 <a:highlight>
                   <a:srgbClr val="FFFF00"/>
                 </a:highlight>
@@ -6074,6 +6332,9 @@
             </a:r>
             <a:r>
               <a:rPr lang="sk-SK" dirty="0" err="1">
+                <a:solidFill>
+                  <a:srgbClr val="FF0000"/>
+                </a:solidFill>
                 <a:highlight>
                   <a:srgbClr val="FFFF00"/>
                 </a:highlight>
@@ -6083,6 +6344,9 @@
             </a:r>
             <a:r>
               <a:rPr lang="sk-SK" dirty="0">
+                <a:solidFill>
+                  <a:srgbClr val="FF0000"/>
+                </a:solidFill>
                 <a:highlight>
                   <a:srgbClr val="FFFF00"/>
                 </a:highlight>
@@ -6098,7 +6362,11 @@
               </a:spcBef>
               <a:buNone/>
             </a:pPr>
-            <a:endParaRPr lang="sk-SK" dirty="0"/>
+            <a:endParaRPr lang="sk-SK" dirty="0">
+              <a:solidFill>
+                <a:srgbClr val="FF0000"/>
+              </a:solidFill>
+            </a:endParaRPr>
           </a:p>
           <a:p>
             <a:pPr marL="0" indent="0">
@@ -6108,7 +6376,14 @@
               <a:buNone/>
             </a:pPr>
             <a:r>
-              <a:rPr lang="sk-SK" dirty="0"/>
+              <a:rPr lang="sk-SK" dirty="0">
+                <a:solidFill>
+                  <a:srgbClr val="FF0000"/>
+                </a:solidFill>
+                <a:highlight>
+                  <a:srgbClr val="00FFFF"/>
+                </a:highlight>
+              </a:rPr>
               <a:t>Inicializácia konkrétnymi hodnotami</a:t>
             </a:r>
           </a:p>
@@ -6119,7 +6394,11 @@
               </a:spcBef>
               <a:buNone/>
             </a:pPr>
-            <a:endParaRPr lang="sk-SK" dirty="0"/>
+            <a:endParaRPr lang="sk-SK" dirty="0">
+              <a:solidFill>
+                <a:srgbClr val="FF0000"/>
+              </a:solidFill>
+            </a:endParaRPr>
           </a:p>
           <a:p>
             <a:pPr marL="0" indent="0">
@@ -6130,6 +6409,9 @@
             </a:pPr>
             <a:r>
               <a:rPr lang="sk-SK" dirty="0" err="1">
+                <a:solidFill>
+                  <a:srgbClr val="FF0000"/>
+                </a:solidFill>
                 <a:highlight>
                   <a:srgbClr val="FFFF00"/>
                 </a:highlight>
@@ -6139,6 +6421,9 @@
             </a:r>
             <a:r>
               <a:rPr lang="sk-SK" dirty="0">
+                <a:solidFill>
+                  <a:srgbClr val="FF0000"/>
+                </a:solidFill>
                 <a:highlight>
                   <a:srgbClr val="FFFF00"/>
                 </a:highlight>
@@ -6154,7 +6439,11 @@
               </a:spcBef>
               <a:buNone/>
             </a:pPr>
-            <a:endParaRPr lang="sk-SK" dirty="0"/>
+            <a:endParaRPr lang="sk-SK" dirty="0">
+              <a:solidFill>
+                <a:srgbClr val="FF0000"/>
+              </a:solidFill>
+            </a:endParaRPr>
           </a:p>
           <a:p>
             <a:pPr marL="0" indent="0">
@@ -6164,7 +6453,14 @@
               <a:buNone/>
             </a:pPr>
             <a:r>
-              <a:rPr lang="sk-SK" dirty="0"/>
+              <a:rPr lang="sk-SK" dirty="0">
+                <a:solidFill>
+                  <a:srgbClr val="FF0000"/>
+                </a:solidFill>
+                <a:highlight>
+                  <a:srgbClr val="00FFFF"/>
+                </a:highlight>
+              </a:rPr>
               <a:t>Prístup k prvkom poľa cez index</a:t>
             </a:r>
           </a:p>
@@ -6175,7 +6471,11 @@
               </a:spcBef>
               <a:buNone/>
             </a:pPr>
-            <a:endParaRPr lang="sk-SK" dirty="0"/>
+            <a:endParaRPr lang="sk-SK" dirty="0">
+              <a:solidFill>
+                <a:srgbClr val="FF0000"/>
+              </a:solidFill>
+            </a:endParaRPr>
           </a:p>
           <a:p>
             <a:pPr marL="0" indent="0">
@@ -6186,6 +6486,9 @@
             </a:pPr>
             <a:r>
               <a:rPr lang="sk-SK" dirty="0" err="1">
+                <a:solidFill>
+                  <a:srgbClr val="FF0000"/>
+                </a:solidFill>
                 <a:highlight>
                   <a:srgbClr val="FFFF00"/>
                 </a:highlight>
@@ -6195,6 +6498,9 @@
             </a:r>
             <a:r>
               <a:rPr lang="sk-SK" dirty="0">
+                <a:solidFill>
+                  <a:srgbClr val="FF0000"/>
+                </a:solidFill>
                 <a:highlight>
                   <a:srgbClr val="FFFF00"/>
                 </a:highlight>
@@ -6212,6 +6518,9 @@
             </a:pPr>
             <a:r>
               <a:rPr lang="sk-SK" dirty="0">
+                <a:solidFill>
+                  <a:srgbClr val="FF0000"/>
+                </a:solidFill>
                 <a:highlight>
                   <a:srgbClr val="FFFF00"/>
                 </a:highlight>
@@ -6689,11 +6998,21 @@
               <a:buNone/>
             </a:pPr>
             <a:r>
-              <a:rPr lang="sk-SK" dirty="0"/>
+              <a:rPr lang="sk-SK" dirty="0">
+                <a:solidFill>
+                  <a:srgbClr val="FF0000"/>
+                </a:solidFill>
+                <a:highlight>
+                  <a:srgbClr val="00FFFF"/>
+                </a:highlight>
+              </a:rPr>
               <a:t>Dĺžku poľa zistím cez </a:t>
             </a:r>
             <a:r>
               <a:rPr lang="sk-SK" dirty="0" err="1">
+                <a:solidFill>
+                  <a:srgbClr val="FF0000"/>
+                </a:solidFill>
                 <a:highlight>
                   <a:srgbClr val="FFFF00"/>
                 </a:highlight>
@@ -6702,6 +7021,9 @@
               <a:t>pole.length</a:t>
             </a:r>
             <a:endParaRPr lang="sk-SK" dirty="0">
+              <a:solidFill>
+                <a:srgbClr val="FF0000"/>
+              </a:solidFill>
               <a:highlight>
                 <a:srgbClr val="FFFF00"/>
               </a:highlight>
@@ -6715,7 +7037,11 @@
               </a:spcBef>
               <a:buNone/>
             </a:pPr>
-            <a:endParaRPr lang="sk-SK" dirty="0"/>
+            <a:endParaRPr lang="sk-SK" dirty="0">
+              <a:solidFill>
+                <a:srgbClr val="FF0000"/>
+              </a:solidFill>
+            </a:endParaRPr>
           </a:p>
           <a:p>
             <a:pPr marL="0" indent="0">
@@ -6725,19 +7051,43 @@
               <a:buNone/>
             </a:pPr>
             <a:r>
-              <a:rPr lang="sk-SK" dirty="0"/>
+              <a:rPr lang="sk-SK" dirty="0">
+                <a:solidFill>
+                  <a:srgbClr val="FF0000"/>
+                </a:solidFill>
+                <a:highlight>
+                  <a:srgbClr val="00FFFF"/>
+                </a:highlight>
+              </a:rPr>
               <a:t>Pole viem </a:t>
             </a:r>
             <a:r>
-              <a:rPr lang="sk-SK" dirty="0" err="1"/>
+              <a:rPr lang="sk-SK" dirty="0" err="1">
+                <a:solidFill>
+                  <a:srgbClr val="FF0000"/>
+                </a:solidFill>
+                <a:highlight>
+                  <a:srgbClr val="00FFFF"/>
+                </a:highlight>
+              </a:rPr>
               <a:t>iterovať</a:t>
             </a:r>
             <a:r>
-              <a:rPr lang="sk-SK" dirty="0"/>
+              <a:rPr lang="sk-SK" dirty="0">
+                <a:solidFill>
+                  <a:srgbClr val="FF0000"/>
+                </a:solidFill>
+                <a:highlight>
+                  <a:srgbClr val="00FFFF"/>
+                </a:highlight>
+              </a:rPr>
               <a:t> vo </a:t>
             </a:r>
             <a:r>
               <a:rPr lang="sk-SK" dirty="0" err="1">
+                <a:solidFill>
+                  <a:srgbClr val="FF0000"/>
+                </a:solidFill>
                 <a:highlight>
                   <a:srgbClr val="FFFF00"/>
                 </a:highlight>
@@ -6746,6 +7096,9 @@
               <a:t>for-each</a:t>
             </a:r>
             <a:endParaRPr lang="sk-SK" dirty="0">
+              <a:solidFill>
+                <a:srgbClr val="FF0000"/>
+              </a:solidFill>
               <a:highlight>
                 <a:srgbClr val="FFFF00"/>
               </a:highlight>
@@ -6874,11 +7227,21 @@
               <a:buNone/>
             </a:pPr>
             <a:r>
-              <a:rPr lang="sk-SK" dirty="0"/>
+              <a:rPr lang="sk-SK" dirty="0">
+                <a:solidFill>
+                  <a:srgbClr val="FF0000"/>
+                </a:solidFill>
+                <a:highlight>
+                  <a:srgbClr val="00FFFF"/>
+                </a:highlight>
+              </a:rPr>
               <a:t>Pole kopírujem cez </a:t>
             </a:r>
             <a:r>
               <a:rPr lang="sk-SK" dirty="0" err="1">
+                <a:solidFill>
+                  <a:srgbClr val="FF0000"/>
+                </a:solidFill>
                 <a:highlight>
                   <a:srgbClr val="FFFF00"/>
                 </a:highlight>
@@ -6888,6 +7251,9 @@
             </a:r>
             <a:r>
               <a:rPr lang="sk-SK" dirty="0">
+                <a:solidFill>
+                  <a:srgbClr val="FF0000"/>
+                </a:solidFill>
                 <a:highlight>
                   <a:srgbClr val="FFFF00"/>
                 </a:highlight>
